--- a/test-corpus/word-verification/c4.pptx
+++ b/test-corpus/word-verification/c4.pptx
@@ -144,8 +144,8 @@
         </p:nvSpPr>
         <p:spPr>
           <a:xfrm>
-            <a:off x="2347449" y="1028700"/>
-            <a:ext cx="7497103" cy="197675"/>
+            <a:off x="457200" y="1194339"/>
+            <a:ext cx="7034784" cy="185485"/>
           </a:xfrm>
           <a:prstGeom prst="rect">
             <a:avLst/>
@@ -168,7 +168,7 @@
               </a:spcAft>
             </a:pPr>
             <a:r>
-              <a:rPr lang="en-US" b="1" sz="850" dirty="0">
+              <a:rPr lang="en-US" b="1" sz="800" dirty="0">
                 <a:solidFill>
                   <a:srgbClr val="000000"/>
                 </a:solidFill>
@@ -186,13 +186,13 @@
         </p:nvCxnSpPr>
         <p:spPr>
           <a:xfrm>
-            <a:off x="4981173" y="2726377"/>
-            <a:ext cx="1" cy="406977"/>
+            <a:off x="2928512" y="2787326"/>
+            <a:ext cx="1" cy="381881"/>
           </a:xfrm>
           <a:prstGeom prst="line">
             <a:avLst/>
           </a:prstGeom>
-          <a:ln w="5814">
+          <a:ln w="5455">
             <a:solidFill>
               <a:srgbClr val="2F5496"/>
             </a:solidFill>
@@ -209,8 +209,8 @@
         </p:nvSpPr>
         <p:spPr>
           <a:xfrm>
-            <a:off x="4771871" y="2871726"/>
-            <a:ext cx="418605" cy="116279"/>
+            <a:off x="2732116" y="2923712"/>
+            <a:ext cx="392791" cy="109109"/>
           </a:xfrm>
           <a:prstGeom prst="rect">
             <a:avLst/>
@@ -233,7 +233,7 @@
               </a:spcAft>
             </a:pPr>
             <a:r>
-              <a:rPr lang="en-US" sz="500" dirty="0">
+              <a:rPr lang="en-US" sz="450" dirty="0">
                 <a:solidFill>
                   <a:srgbClr val="000000"/>
                 </a:solidFill>
@@ -251,13 +251,13 @@
         </p:nvCxnSpPr>
         <p:spPr>
           <a:xfrm flipH="1">
-            <a:off x="4033048" y="2726377"/>
-            <a:ext cx="800319" cy="1290699"/>
+            <a:off x="2038854" y="2787326"/>
+            <a:ext cx="750966" cy="1211107"/>
           </a:xfrm>
           <a:prstGeom prst="line">
             <a:avLst/>
           </a:prstGeom>
-          <a:ln w="5814">
+          <a:ln w="5455">
             <a:solidFill>
               <a:srgbClr val="2F5496"/>
             </a:solidFill>
@@ -274,8 +274,8 @@
         </p:nvSpPr>
         <p:spPr>
           <a:xfrm>
-            <a:off x="4223905" y="3313587"/>
-            <a:ext cx="418605" cy="116279"/>
+            <a:off x="2217942" y="3338325"/>
+            <a:ext cx="392791" cy="109109"/>
           </a:xfrm>
           <a:prstGeom prst="rect">
             <a:avLst/>
@@ -298,7 +298,7 @@
               </a:spcAft>
             </a:pPr>
             <a:r>
-              <a:rPr lang="en-US" sz="500" dirty="0">
+              <a:rPr lang="en-US" sz="450" dirty="0">
                 <a:solidFill>
                   <a:srgbClr val="000000"/>
                 </a:solidFill>
@@ -316,13 +316,13 @@
         </p:nvCxnSpPr>
         <p:spPr>
           <a:xfrm>
-            <a:off x="5288548" y="2726377"/>
-            <a:ext cx="1664323" cy="1290699"/>
+            <a:off x="3216932" y="2787326"/>
+            <a:ext cx="1561691" cy="1211107"/>
           </a:xfrm>
           <a:prstGeom prst="line">
             <a:avLst/>
           </a:prstGeom>
-          <a:ln w="5814">
+          <a:ln w="5455">
             <a:solidFill>
               <a:srgbClr val="2F5496"/>
             </a:solidFill>
@@ -339,8 +339,8 @@
         </p:nvSpPr>
         <p:spPr>
           <a:xfrm>
-            <a:off x="6027686" y="3313587"/>
-            <a:ext cx="186047" cy="116279"/>
+            <a:off x="3910490" y="3338325"/>
+            <a:ext cx="174574" cy="109109"/>
           </a:xfrm>
           <a:prstGeom prst="rect">
             <a:avLst/>
@@ -363,7 +363,7 @@
               </a:spcAft>
             </a:pPr>
             <a:r>
-              <a:rPr lang="en-US" sz="500" dirty="0">
+              <a:rPr lang="en-US" sz="450" dirty="0">
                 <a:solidFill>
                   <a:srgbClr val="000000"/>
                 </a:solidFill>
@@ -381,13 +381,13 @@
         </p:nvCxnSpPr>
         <p:spPr>
           <a:xfrm flipH="1">
-            <a:off x="4180855" y="3610099"/>
-            <a:ext cx="504705" cy="406977"/>
+            <a:off x="2177546" y="3616552"/>
+            <a:ext cx="473582" cy="381881"/>
           </a:xfrm>
           <a:prstGeom prst="line">
             <a:avLst/>
           </a:prstGeom>
-          <a:ln w="5814">
+          <a:ln w="5455">
             <a:solidFill>
               <a:srgbClr val="2F5496"/>
             </a:solidFill>
@@ -404,8 +404,8 @@
         </p:nvSpPr>
         <p:spPr>
           <a:xfrm>
-            <a:off x="4284370" y="3755448"/>
-            <a:ext cx="297675" cy="116279"/>
+            <a:off x="2274678" y="3752938"/>
+            <a:ext cx="279318" cy="109109"/>
           </a:xfrm>
           <a:prstGeom prst="rect">
             <a:avLst/>
@@ -428,7 +428,7 @@
               </a:spcAft>
             </a:pPr>
             <a:r>
-              <a:rPr lang="en-US" sz="500" dirty="0">
+              <a:rPr lang="en-US" sz="450" dirty="0">
                 <a:solidFill>
                   <a:srgbClr val="000000"/>
                 </a:solidFill>
@@ -446,13 +446,13 @@
         </p:nvCxnSpPr>
         <p:spPr>
           <a:xfrm>
-            <a:off x="4795605" y="4493821"/>
-            <a:ext cx="1554278" cy="406977"/>
+            <a:off x="2754387" y="4445778"/>
+            <a:ext cx="1458432" cy="381881"/>
           </a:xfrm>
           <a:prstGeom prst="line">
             <a:avLst/>
           </a:prstGeom>
-          <a:ln w="5814">
+          <a:ln w="5455">
             <a:solidFill>
               <a:srgbClr val="2F5496"/>
             </a:solidFill>
@@ -469,8 +469,8 @@
         </p:nvSpPr>
         <p:spPr>
           <a:xfrm>
-            <a:off x="5193674" y="4639170"/>
-            <a:ext cx="758141" cy="116279"/>
+            <a:off x="3127908" y="4582164"/>
+            <a:ext cx="711389" cy="109109"/>
           </a:xfrm>
           <a:prstGeom prst="rect">
             <a:avLst/>
@@ -493,7 +493,7 @@
               </a:spcAft>
             </a:pPr>
             <a:r>
-              <a:rPr lang="en-US" sz="500" dirty="0">
+              <a:rPr lang="en-US" sz="450" dirty="0">
                 <a:solidFill>
                   <a:srgbClr val="000000"/>
                 </a:solidFill>
@@ -511,13 +511,13 @@
         </p:nvCxnSpPr>
         <p:spPr>
           <a:xfrm>
-            <a:off x="7260246" y="4493821"/>
-            <a:ext cx="1" cy="406977"/>
+            <a:off x="5067043" y="4445778"/>
+            <a:ext cx="1" cy="381881"/>
           </a:xfrm>
           <a:prstGeom prst="line">
             <a:avLst/>
           </a:prstGeom>
-          <a:ln w="5814">
+          <a:ln w="5455">
             <a:solidFill>
               <a:srgbClr val="2F5496"/>
             </a:solidFill>
@@ -534,8 +534,8 @@
         </p:nvSpPr>
         <p:spPr>
           <a:xfrm>
-            <a:off x="6881176" y="4639170"/>
-            <a:ext cx="758141" cy="116279"/>
+            <a:off x="4711348" y="4582164"/>
+            <a:ext cx="711389" cy="109109"/>
           </a:xfrm>
           <a:prstGeom prst="rect">
             <a:avLst/>
@@ -558,7 +558,7 @@
               </a:spcAft>
             </a:pPr>
             <a:r>
-              <a:rPr lang="en-US" sz="500" dirty="0">
+              <a:rPr lang="en-US" sz="450" dirty="0">
                 <a:solidFill>
                   <a:srgbClr val="000000"/>
                 </a:solidFill>
@@ -576,13 +576,13 @@
         </p:nvCxnSpPr>
         <p:spPr>
           <a:xfrm flipH="1">
-            <a:off x="5636258" y="5377543"/>
-            <a:ext cx="1024136" cy="406977"/>
+            <a:off x="3543200" y="5275005"/>
+            <a:ext cx="960982" cy="381880"/>
           </a:xfrm>
           <a:prstGeom prst="line">
             <a:avLst/>
           </a:prstGeom>
-          <a:ln w="5814">
+          <a:ln w="5455">
             <a:solidFill>
               <a:srgbClr val="2F5496"/>
             </a:solidFill>
@@ -599,8 +599,8 @@
         </p:nvSpPr>
         <p:spPr>
           <a:xfrm>
-            <a:off x="5627395" y="5522892"/>
-            <a:ext cx="1041862" cy="116279"/>
+            <a:off x="3534884" y="5411390"/>
+            <a:ext cx="977614" cy="109109"/>
           </a:xfrm>
           <a:prstGeom prst="rect">
             <a:avLst/>
@@ -623,7 +623,7 @@
               </a:spcAft>
             </a:pPr>
             <a:r>
-              <a:rPr lang="en-US" sz="500" dirty="0">
+              <a:rPr lang="en-US" sz="450" dirty="0">
                 <a:solidFill>
                   <a:srgbClr val="000000"/>
                 </a:solidFill>
@@ -641,13 +641,13 @@
         </p:nvCxnSpPr>
         <p:spPr>
           <a:xfrm flipH="1">
-            <a:off x="5691194" y="1837534"/>
-            <a:ext cx="1227482" cy="412098"/>
+            <a:off x="3594748" y="1953295"/>
+            <a:ext cx="1151788" cy="386685"/>
           </a:xfrm>
           <a:prstGeom prst="line">
             <a:avLst/>
           </a:prstGeom>
-          <a:ln w="5814">
+          <a:ln w="5455">
             <a:solidFill>
               <a:srgbClr val="2F5496"/>
             </a:solidFill>
@@ -664,8 +664,8 @@
         </p:nvSpPr>
         <p:spPr>
           <a:xfrm>
-            <a:off x="6058423" y="1985443"/>
-            <a:ext cx="493024" cy="116279"/>
+            <a:off x="3939332" y="2092083"/>
+            <a:ext cx="462621" cy="109109"/>
           </a:xfrm>
           <a:prstGeom prst="rect">
             <a:avLst/>
@@ -688,7 +688,7 @@
               </a:spcAft>
             </a:pPr>
             <a:r>
-              <a:rPr lang="en-US" sz="500" dirty="0">
+              <a:rPr lang="en-US" sz="450" dirty="0">
                 <a:solidFill>
                   <a:srgbClr val="000000"/>
                 </a:solidFill>
@@ -706,13 +706,13 @@
         </p:nvCxnSpPr>
         <p:spPr>
           <a:xfrm flipV="1">
-            <a:off x="7284064" y="1842655"/>
-            <a:ext cx="305563" cy="3058143"/>
+            <a:off x="5089392" y="1958100"/>
+            <a:ext cx="286720" cy="2869559"/>
           </a:xfrm>
           <a:prstGeom prst="line">
             <a:avLst/>
           </a:prstGeom>
-          <a:ln w="5814">
+          <a:ln w="5455">
             <a:solidFill>
               <a:srgbClr val="2F5496"/>
             </a:solidFill>
@@ -729,8 +729,8 @@
         </p:nvSpPr>
         <p:spPr>
           <a:xfrm>
-            <a:off x="6971728" y="3313587"/>
-            <a:ext cx="930234" cy="116279"/>
+            <a:off x="4796317" y="3338325"/>
+            <a:ext cx="872870" cy="109109"/>
           </a:xfrm>
           <a:prstGeom prst="rect">
             <a:avLst/>
@@ -753,7 +753,7 @@
               </a:spcAft>
             </a:pPr>
             <a:r>
-              <a:rPr lang="en-US" sz="500" dirty="0">
+              <a:rPr lang="en-US" sz="450" dirty="0">
                 <a:solidFill>
                   <a:srgbClr val="000000"/>
                 </a:solidFill>
@@ -771,13 +771,13 @@
         </p:nvCxnSpPr>
         <p:spPr>
           <a:xfrm>
-            <a:off x="7515085" y="5377543"/>
-            <a:ext cx="435091" cy="406977"/>
+            <a:off x="5306167" y="5275005"/>
+            <a:ext cx="408260" cy="381880"/>
           </a:xfrm>
           <a:prstGeom prst="line">
             <a:avLst/>
           </a:prstGeom>
-          <a:ln w="5814">
+          <a:ln w="5455">
             <a:solidFill>
               <a:srgbClr val="2F5496"/>
             </a:solidFill>
@@ -794,8 +794,8 @@
         </p:nvSpPr>
         <p:spPr>
           <a:xfrm>
-            <a:off x="7300072" y="5522892"/>
-            <a:ext cx="865117" cy="116279"/>
+            <a:off x="5104412" y="5411390"/>
+            <a:ext cx="811769" cy="109109"/>
           </a:xfrm>
           <a:prstGeom prst="rect">
             <a:avLst/>
@@ -818,7 +818,7 @@
               </a:spcAft>
             </a:pPr>
             <a:r>
-              <a:rPr lang="en-US" sz="500" dirty="0">
+              <a:rPr lang="en-US" sz="450" dirty="0">
                 <a:solidFill>
                   <a:srgbClr val="000000"/>
                 </a:solidFill>
@@ -836,8 +836,8 @@
         </p:nvSpPr>
         <p:spPr>
           <a:xfrm>
-            <a:off x="6918676" y="1365910"/>
-            <a:ext cx="1389537" cy="476745"/>
+            <a:off x="4746536" y="1510754"/>
+            <a:ext cx="1303849" cy="447346"/>
           </a:xfrm>
           <a:prstGeom prst="rect">
             <a:avLst/>
@@ -860,8 +860,8 @@
         </p:nvSpPr>
         <p:spPr>
           <a:xfrm>
-            <a:off x="6918676" y="1365910"/>
-            <a:ext cx="1389537" cy="186047"/>
+            <a:off x="4746536" y="1510754"/>
+            <a:ext cx="1303849" cy="174574"/>
           </a:xfrm>
           <a:prstGeom prst="rect">
             <a:avLst/>
@@ -882,8 +882,8 @@
         </p:nvSpPr>
         <p:spPr>
           <a:xfrm>
-            <a:off x="6918676" y="1549050"/>
-            <a:ext cx="1389537" cy="5814"/>
+            <a:off x="4746536" y="1682600"/>
+            <a:ext cx="1303849" cy="5455"/>
           </a:xfrm>
           <a:prstGeom prst="rect">
             <a:avLst/>
@@ -904,8 +904,8 @@
         </p:nvSpPr>
         <p:spPr>
           <a:xfrm>
-            <a:off x="6918676" y="1365910"/>
-            <a:ext cx="1389537" cy="186047"/>
+            <a:off x="4746536" y="1510754"/>
+            <a:ext cx="1303849" cy="174574"/>
           </a:xfrm>
           <a:prstGeom prst="rect">
             <a:avLst/>
@@ -946,8 +946,8 @@
         </p:nvSpPr>
         <p:spPr>
           <a:xfrm>
-            <a:off x="6976816" y="1551957"/>
-            <a:ext cx="1273257" cy="290698"/>
+            <a:off x="4801090" y="1685328"/>
+            <a:ext cx="1194741" cy="272772"/>
           </a:xfrm>
           <a:prstGeom prst="rect">
             <a:avLst/>
@@ -970,7 +970,7 @@
               </a:spcAft>
             </a:pPr>
             <a:r>
-              <a:rPr lang="en-US" sz="550" dirty="0">
+              <a:rPr lang="en-US" sz="500" dirty="0">
                 <a:solidFill>
                   <a:srgbClr val="000000"/>
                 </a:solidFill>
@@ -988,7 +988,7 @@
               </a:spcAft>
             </a:pPr>
             <a:r>
-              <a:rPr lang="en-US" sz="550" dirty="0">
+              <a:rPr lang="en-US" sz="500" dirty="0">
                 <a:solidFill>
                   <a:srgbClr val="000000"/>
                 </a:solidFill>
@@ -1006,8 +1006,8 @@
         </p:nvSpPr>
         <p:spPr>
           <a:xfrm>
-            <a:off x="4100358" y="2249632"/>
-            <a:ext cx="1761630" cy="476745"/>
+            <a:off x="2102014" y="2339980"/>
+            <a:ext cx="1652997" cy="447346"/>
           </a:xfrm>
           <a:prstGeom prst="rect">
             <a:avLst/>
@@ -1030,8 +1030,8 @@
         </p:nvSpPr>
         <p:spPr>
           <a:xfrm>
-            <a:off x="4100358" y="2249632"/>
-            <a:ext cx="1761630" cy="186047"/>
+            <a:off x="2102014" y="2339980"/>
+            <a:ext cx="1652997" cy="174574"/>
           </a:xfrm>
           <a:prstGeom prst="rect">
             <a:avLst/>
@@ -1052,8 +1052,8 @@
         </p:nvSpPr>
         <p:spPr>
           <a:xfrm>
-            <a:off x="4100358" y="2432772"/>
-            <a:ext cx="1761630" cy="5814"/>
+            <a:off x="2102014" y="2511826"/>
+            <a:ext cx="1652997" cy="5455"/>
           </a:xfrm>
           <a:prstGeom prst="rect">
             <a:avLst/>
@@ -1074,8 +1074,8 @@
         </p:nvSpPr>
         <p:spPr>
           <a:xfrm>
-            <a:off x="4100358" y="2249632"/>
-            <a:ext cx="1761630" cy="186047"/>
+            <a:off x="2102014" y="2339980"/>
+            <a:ext cx="1652997" cy="174574"/>
           </a:xfrm>
           <a:prstGeom prst="rect">
             <a:avLst/>
@@ -1116,8 +1116,8 @@
         </p:nvSpPr>
         <p:spPr>
           <a:xfrm>
-            <a:off x="4158498" y="2435679"/>
-            <a:ext cx="1645350" cy="290698"/>
+            <a:off x="2156568" y="2514554"/>
+            <a:ext cx="1543889" cy="272772"/>
           </a:xfrm>
           <a:prstGeom prst="rect">
             <a:avLst/>
@@ -1140,7 +1140,7 @@
               </a:spcAft>
             </a:pPr>
             <a:r>
-              <a:rPr lang="en-US" sz="550" dirty="0">
+              <a:rPr lang="en-US" sz="500" dirty="0">
                 <a:solidFill>
                   <a:srgbClr val="000000"/>
                 </a:solidFill>
@@ -1158,7 +1158,7 @@
               </a:spcAft>
             </a:pPr>
             <a:r>
-              <a:rPr lang="en-US" sz="550" dirty="0">
+              <a:rPr lang="en-US" sz="500" dirty="0">
                 <a:solidFill>
                   <a:srgbClr val="000000"/>
                 </a:solidFill>
@@ -1176,8 +1176,8 @@
         </p:nvSpPr>
         <p:spPr>
           <a:xfrm>
-            <a:off x="2486984" y="4017076"/>
-            <a:ext cx="2796515" cy="476745"/>
+            <a:off x="588130" y="3998433"/>
+            <a:ext cx="2624064" cy="447346"/>
           </a:xfrm>
           <a:prstGeom prst="rect">
             <a:avLst/>
@@ -1200,8 +1200,8 @@
         </p:nvSpPr>
         <p:spPr>
           <a:xfrm>
-            <a:off x="2486984" y="4017076"/>
-            <a:ext cx="2796515" cy="186047"/>
+            <a:off x="588130" y="3998433"/>
+            <a:ext cx="2624064" cy="174574"/>
           </a:xfrm>
           <a:prstGeom prst="rect">
             <a:avLst/>
@@ -1222,8 +1222,8 @@
         </p:nvSpPr>
         <p:spPr>
           <a:xfrm>
-            <a:off x="2486984" y="4200216"/>
-            <a:ext cx="2796515" cy="5814"/>
+            <a:off x="588130" y="4170279"/>
+            <a:ext cx="2624064" cy="5455"/>
           </a:xfrm>
           <a:prstGeom prst="rect">
             <a:avLst/>
@@ -1244,8 +1244,8 @@
         </p:nvSpPr>
         <p:spPr>
           <a:xfrm>
-            <a:off x="2486984" y="4017076"/>
-            <a:ext cx="2796515" cy="186047"/>
+            <a:off x="588130" y="3998433"/>
+            <a:ext cx="2624064" cy="174574"/>
           </a:xfrm>
           <a:prstGeom prst="rect">
             <a:avLst/>
@@ -1286,8 +1286,8 @@
         </p:nvSpPr>
         <p:spPr>
           <a:xfrm>
-            <a:off x="2545124" y="4203123"/>
-            <a:ext cx="2680235" cy="290698"/>
+            <a:off x="642684" y="4173007"/>
+            <a:ext cx="2514956" cy="272772"/>
           </a:xfrm>
           <a:prstGeom prst="rect">
             <a:avLst/>
@@ -1310,7 +1310,7 @@
               </a:spcAft>
             </a:pPr>
             <a:r>
-              <a:rPr lang="en-US" sz="550" dirty="0">
+              <a:rPr lang="en-US" sz="500" dirty="0">
                 <a:solidFill>
                   <a:srgbClr val="000000"/>
                 </a:solidFill>
@@ -1328,7 +1328,7 @@
               </a:spcAft>
             </a:pPr>
             <a:r>
-              <a:rPr lang="en-US" sz="550" dirty="0">
+              <a:rPr lang="en-US" sz="500" dirty="0">
                 <a:solidFill>
                   <a:srgbClr val="000000"/>
                 </a:solidFill>
@@ -1346,8 +1346,8 @@
         </p:nvSpPr>
         <p:spPr>
           <a:xfrm>
-            <a:off x="5574197" y="4017076"/>
-            <a:ext cx="3372097" cy="476745"/>
+            <a:off x="3484967" y="3998433"/>
+            <a:ext cx="3164152" cy="447346"/>
           </a:xfrm>
           <a:prstGeom prst="rect">
             <a:avLst/>
@@ -1370,8 +1370,8 @@
         </p:nvSpPr>
         <p:spPr>
           <a:xfrm>
-            <a:off x="5574197" y="4017076"/>
-            <a:ext cx="3372097" cy="186047"/>
+            <a:off x="3484967" y="3998433"/>
+            <a:ext cx="3164152" cy="174574"/>
           </a:xfrm>
           <a:prstGeom prst="rect">
             <a:avLst/>
@@ -1392,8 +1392,8 @@
         </p:nvSpPr>
         <p:spPr>
           <a:xfrm>
-            <a:off x="5574197" y="4200216"/>
-            <a:ext cx="3372097" cy="5814"/>
+            <a:off x="3484967" y="4170279"/>
+            <a:ext cx="3164152" cy="5455"/>
           </a:xfrm>
           <a:prstGeom prst="rect">
             <a:avLst/>
@@ -1414,8 +1414,8 @@
         </p:nvSpPr>
         <p:spPr>
           <a:xfrm>
-            <a:off x="5574197" y="4017076"/>
-            <a:ext cx="3372097" cy="186047"/>
+            <a:off x="3484967" y="3998433"/>
+            <a:ext cx="3164152" cy="174574"/>
           </a:xfrm>
           <a:prstGeom prst="rect">
             <a:avLst/>
@@ -1456,8 +1456,8 @@
         </p:nvSpPr>
         <p:spPr>
           <a:xfrm>
-            <a:off x="5632337" y="4203123"/>
-            <a:ext cx="3255817" cy="290698"/>
+            <a:off x="3539521" y="4173007"/>
+            <a:ext cx="3055044" cy="272772"/>
           </a:xfrm>
           <a:prstGeom prst="rect">
             <a:avLst/>
@@ -1480,7 +1480,7 @@
               </a:spcAft>
             </a:pPr>
             <a:r>
-              <a:rPr lang="en-US" sz="550" dirty="0">
+              <a:rPr lang="en-US" sz="500" dirty="0">
                 <a:solidFill>
                   <a:srgbClr val="000000"/>
                 </a:solidFill>
@@ -1498,7 +1498,7 @@
               </a:spcAft>
             </a:pPr>
             <a:r>
-              <a:rPr lang="en-US" sz="550" dirty="0">
+              <a:rPr lang="en-US" sz="500" dirty="0">
                 <a:solidFill>
                   <a:srgbClr val="000000"/>
                 </a:solidFill>
@@ -1516,8 +1516,8 @@
         </p:nvSpPr>
         <p:spPr>
           <a:xfrm>
-            <a:off x="4001521" y="3133354"/>
-            <a:ext cx="1959305" cy="476745"/>
+            <a:off x="2009271" y="3169207"/>
+            <a:ext cx="1838482" cy="447346"/>
           </a:xfrm>
           <a:prstGeom prst="rect">
             <a:avLst/>
@@ -1540,8 +1540,8 @@
         </p:nvSpPr>
         <p:spPr>
           <a:xfrm>
-            <a:off x="4001521" y="3133354"/>
-            <a:ext cx="1959305" cy="186047"/>
+            <a:off x="2009271" y="3169207"/>
+            <a:ext cx="1838482" cy="174574"/>
           </a:xfrm>
           <a:prstGeom prst="rect">
             <a:avLst/>
@@ -1562,8 +1562,8 @@
         </p:nvSpPr>
         <p:spPr>
           <a:xfrm>
-            <a:off x="4001521" y="3316494"/>
-            <a:ext cx="1959305" cy="5814"/>
+            <a:off x="2009271" y="3341053"/>
+            <a:ext cx="1838482" cy="5455"/>
           </a:xfrm>
           <a:prstGeom prst="rect">
             <a:avLst/>
@@ -1584,8 +1584,8 @@
         </p:nvSpPr>
         <p:spPr>
           <a:xfrm>
-            <a:off x="4001521" y="3133354"/>
-            <a:ext cx="1959305" cy="186047"/>
+            <a:off x="2009271" y="3169207"/>
+            <a:ext cx="1838482" cy="174574"/>
           </a:xfrm>
           <a:prstGeom prst="rect">
             <a:avLst/>
@@ -1626,8 +1626,8 @@
         </p:nvSpPr>
         <p:spPr>
           <a:xfrm>
-            <a:off x="4059661" y="3319401"/>
-            <a:ext cx="1843025" cy="290698"/>
+            <a:off x="2063825" y="3343781"/>
+            <a:ext cx="1729374" cy="272772"/>
           </a:xfrm>
           <a:prstGeom prst="rect">
             <a:avLst/>
@@ -1650,7 +1650,7 @@
               </a:spcAft>
             </a:pPr>
             <a:r>
-              <a:rPr lang="en-US" sz="550" dirty="0">
+              <a:rPr lang="en-US" sz="500" dirty="0">
                 <a:solidFill>
                   <a:srgbClr val="000000"/>
                 </a:solidFill>
@@ -1668,7 +1668,7 @@
               </a:spcAft>
             </a:pPr>
             <a:r>
-              <a:rPr lang="en-US" sz="550" dirty="0">
+              <a:rPr lang="en-US" sz="500" dirty="0">
                 <a:solidFill>
                   <a:srgbClr val="000000"/>
                 </a:solidFill>
@@ -1686,8 +1686,8 @@
         </p:nvSpPr>
         <p:spPr>
           <a:xfrm>
-            <a:off x="3658497" y="5784520"/>
-            <a:ext cx="2755818" cy="476745"/>
+            <a:off x="1687401" y="5656885"/>
+            <a:ext cx="2585876" cy="447346"/>
           </a:xfrm>
           <a:prstGeom prst="rect">
             <a:avLst/>
@@ -1710,8 +1710,8 @@
         </p:nvSpPr>
         <p:spPr>
           <a:xfrm>
-            <a:off x="3658497" y="5784520"/>
-            <a:ext cx="2755818" cy="186047"/>
+            <a:off x="1687401" y="5656885"/>
+            <a:ext cx="2585876" cy="174574"/>
           </a:xfrm>
           <a:prstGeom prst="rect">
             <a:avLst/>
@@ -1732,8 +1732,8 @@
         </p:nvSpPr>
         <p:spPr>
           <a:xfrm>
-            <a:off x="3658497" y="5967660"/>
-            <a:ext cx="2755818" cy="5814"/>
+            <a:off x="1687401" y="5828731"/>
+            <a:ext cx="2585876" cy="5455"/>
           </a:xfrm>
           <a:prstGeom prst="rect">
             <a:avLst/>
@@ -1754,8 +1754,8 @@
         </p:nvSpPr>
         <p:spPr>
           <a:xfrm>
-            <a:off x="3658497" y="5784520"/>
-            <a:ext cx="2755818" cy="186047"/>
+            <a:off x="1687401" y="5656885"/>
+            <a:ext cx="2585876" cy="174574"/>
           </a:xfrm>
           <a:prstGeom prst="rect">
             <a:avLst/>
@@ -1796,8 +1796,8 @@
         </p:nvSpPr>
         <p:spPr>
           <a:xfrm>
-            <a:off x="3716637" y="5970567"/>
-            <a:ext cx="2639538" cy="290698"/>
+            <a:off x="1741955" y="5831459"/>
+            <a:ext cx="2476768" cy="272772"/>
           </a:xfrm>
           <a:prstGeom prst="rect">
             <a:avLst/>
@@ -1820,7 +1820,7 @@
               </a:spcAft>
             </a:pPr>
             <a:r>
-              <a:rPr lang="en-US" sz="550" dirty="0">
+              <a:rPr lang="en-US" sz="500" dirty="0">
                 <a:solidFill>
                   <a:srgbClr val="000000"/>
                 </a:solidFill>
@@ -1838,7 +1838,7 @@
               </a:spcAft>
             </a:pPr>
             <a:r>
-              <a:rPr lang="en-US" sz="550" dirty="0">
+              <a:rPr lang="en-US" sz="500" dirty="0">
                 <a:solidFill>
                   <a:srgbClr val="000000"/>
                 </a:solidFill>
@@ -1856,8 +1856,8 @@
         </p:nvSpPr>
         <p:spPr>
           <a:xfrm>
-            <a:off x="6268966" y="4900798"/>
-            <a:ext cx="1982561" cy="476745"/>
+            <a:off x="4136891" y="4827659"/>
+            <a:ext cx="1860303" cy="447346"/>
           </a:xfrm>
           <a:prstGeom prst="rect">
             <a:avLst/>
@@ -1880,8 +1880,8 @@
         </p:nvSpPr>
         <p:spPr>
           <a:xfrm>
-            <a:off x="6268966" y="4900798"/>
-            <a:ext cx="1982561" cy="186047"/>
+            <a:off x="4136891" y="4827659"/>
+            <a:ext cx="1860303" cy="174574"/>
           </a:xfrm>
           <a:prstGeom prst="rect">
             <a:avLst/>
@@ -1902,8 +1902,8 @@
         </p:nvSpPr>
         <p:spPr>
           <a:xfrm>
-            <a:off x="6268966" y="5083938"/>
-            <a:ext cx="1982561" cy="5814"/>
+            <a:off x="4136891" y="4999505"/>
+            <a:ext cx="1860303" cy="5455"/>
           </a:xfrm>
           <a:prstGeom prst="rect">
             <a:avLst/>
@@ -1924,8 +1924,8 @@
         </p:nvSpPr>
         <p:spPr>
           <a:xfrm>
-            <a:off x="6268966" y="4900798"/>
-            <a:ext cx="1982561" cy="186047"/>
+            <a:off x="4136891" y="4827659"/>
+            <a:ext cx="1860303" cy="174574"/>
           </a:xfrm>
           <a:prstGeom prst="rect">
             <a:avLst/>
@@ -1966,8 +1966,8 @@
         </p:nvSpPr>
         <p:spPr>
           <a:xfrm>
-            <a:off x="6327106" y="5086845"/>
-            <a:ext cx="1866281" cy="290698"/>
+            <a:off x="4191445" y="5002233"/>
+            <a:ext cx="1751195" cy="272772"/>
           </a:xfrm>
           <a:prstGeom prst="rect">
             <a:avLst/>
@@ -1990,7 +1990,7 @@
               </a:spcAft>
             </a:pPr>
             <a:r>
-              <a:rPr lang="en-US" sz="550" dirty="0">
+              <a:rPr lang="en-US" sz="500" dirty="0">
                 <a:solidFill>
                   <a:srgbClr val="000000"/>
                 </a:solidFill>
@@ -2008,7 +2008,7 @@
               </a:spcAft>
             </a:pPr>
             <a:r>
-              <a:rPr lang="en-US" sz="550" dirty="0">
+              <a:rPr lang="en-US" sz="500" dirty="0">
                 <a:solidFill>
                   <a:srgbClr val="000000"/>
                 </a:solidFill>
@@ -2026,8 +2026,8 @@
         </p:nvSpPr>
         <p:spPr>
           <a:xfrm>
-            <a:off x="6705013" y="5784520"/>
-            <a:ext cx="3000004" cy="476745"/>
+            <a:off x="4546049" y="5656885"/>
+            <a:ext cx="2815005" cy="447346"/>
           </a:xfrm>
           <a:prstGeom prst="rect">
             <a:avLst/>
@@ -2050,8 +2050,8 @@
         </p:nvSpPr>
         <p:spPr>
           <a:xfrm>
-            <a:off x="6705013" y="5784520"/>
-            <a:ext cx="3000004" cy="186047"/>
+            <a:off x="4546049" y="5656885"/>
+            <a:ext cx="2815005" cy="174574"/>
           </a:xfrm>
           <a:prstGeom prst="rect">
             <a:avLst/>
@@ -2072,8 +2072,8 @@
         </p:nvSpPr>
         <p:spPr>
           <a:xfrm>
-            <a:off x="6705013" y="5967660"/>
-            <a:ext cx="3000004" cy="5814"/>
+            <a:off x="4546049" y="5828731"/>
+            <a:ext cx="2815005" cy="5455"/>
           </a:xfrm>
           <a:prstGeom prst="rect">
             <a:avLst/>
@@ -2094,8 +2094,8 @@
         </p:nvSpPr>
         <p:spPr>
           <a:xfrm>
-            <a:off x="6705013" y="5784520"/>
-            <a:ext cx="3000004" cy="186047"/>
+            <a:off x="4546049" y="5656885"/>
+            <a:ext cx="2815005" cy="174574"/>
           </a:xfrm>
           <a:prstGeom prst="rect">
             <a:avLst/>
@@ -2136,8 +2136,8 @@
         </p:nvSpPr>
         <p:spPr>
           <a:xfrm>
-            <a:off x="6763153" y="5970567"/>
-            <a:ext cx="2883724" cy="290698"/>
+            <a:off x="4600603" y="5831459"/>
+            <a:ext cx="2705897" cy="272772"/>
           </a:xfrm>
           <a:prstGeom prst="rect">
             <a:avLst/>
@@ -2160,7 +2160,7 @@
               </a:spcAft>
             </a:pPr>
             <a:r>
-              <a:rPr lang="en-US" sz="550" dirty="0">
+              <a:rPr lang="en-US" sz="500" dirty="0">
                 <a:solidFill>
                   <a:srgbClr val="000000"/>
                 </a:solidFill>
@@ -2178,12 +2178,346 @@
               </a:spcAft>
             </a:pPr>
             <a:r>
-              <a:rPr lang="en-US" sz="550" dirty="0">
+              <a:rPr lang="en-US" sz="500" dirty="0">
                 <a:solidFill>
                   <a:srgbClr val="000000"/>
                 </a:solidFill>
               </a:rPr>
               <a:t>Stores all of the core banking information about customers, accounts, transactions, etc.</a:t>
+            </a:r>
+          </a:p>
+        </p:txBody>
+      </p:sp>
+      <p:sp>
+        <p:nvSpPr>
+          <p:cNvPr id="4" name="Mermaid source"/>
+          <p:cNvSpPr/>
+          <p:nvPr/>
+        </p:nvSpPr>
+        <p:spPr>
+          <a:xfrm>
+            <a:off x="7674864" y="1028700"/>
+            <a:ext cx="4059936" cy="5372100"/>
+          </a:xfrm>
+          <a:prstGeom prst="rect">
+            <a:avLst/>
+          </a:prstGeom>
+          <a:solidFill>
+            <a:srgbClr val="F3F4F6"/>
+          </a:solidFill>
+          <a:ln w="9525">
+            <a:solidFill>
+              <a:srgbClr val="D1D5DB"/>
+            </a:solidFill>
+          </a:ln>
+        </p:spPr>
+        <p:txBody>
+          <a:bodyPr wrap="square" lIns="91440" tIns="45720" rIns="91440" bIns="45720" anchor="t">
+            <a:noAutofit/>
+          </a:bodyPr>
+          <a:lstStyle/>
+          <a:p>
+            <a:pPr algn="l"/>
+            <a:r>
+              <a:rPr lang="en-US" sz="750" dirty="0">
+                <a:solidFill>
+                  <a:srgbClr val="1F2937"/>
+                </a:solidFill>
+                <a:latin typeface="Consolas"/>
+                <a:cs typeface="Consolas"/>
+              </a:rPr>
+              <a:t>C4Container</a:t>
+            </a:r>
+          </a:p>
+          <a:p>
+            <a:pPr algn="l"/>
+            <a:r>
+              <a:rPr lang="en-US" sz="750" dirty="0">
+                <a:solidFill>
+                  <a:srgbClr val="1F2937"/>
+                </a:solidFill>
+                <a:latin typeface="Consolas"/>
+                <a:cs typeface="Consolas"/>
+              </a:rPr>
+              <a:t>    title Container diagram for Internet Banking System</a:t>
+            </a:r>
+          </a:p>
+          <a:p>
+            <a:endParaRPr lang="en-US" sz="750" dirty="0"/>
+          </a:p>
+          <a:p>
+            <a:pPr algn="l"/>
+            <a:r>
+              <a:rPr lang="en-US" sz="750" dirty="0">
+                <a:solidFill>
+                  <a:srgbClr val="1F2937"/>
+                </a:solidFill>
+                <a:latin typeface="Consolas"/>
+                <a:cs typeface="Consolas"/>
+              </a:rPr>
+              <a:t>    System_Ext(email_system, "E-Mail System", "The internal Microsoft Exchange system")</a:t>
+            </a:r>
+          </a:p>
+          <a:p>
+            <a:pPr algn="l"/>
+            <a:r>
+              <a:rPr lang="en-US" sz="750" dirty="0">
+                <a:solidFill>
+                  <a:srgbClr val="1F2937"/>
+                </a:solidFill>
+                <a:latin typeface="Consolas"/>
+                <a:cs typeface="Consolas"/>
+              </a:rPr>
+              <a:t>    Person(customer, "Customer", "A customer of the bank, with personal bank accounts")</a:t>
+            </a:r>
+          </a:p>
+          <a:p>
+            <a:endParaRPr lang="en-US" sz="750" dirty="0"/>
+          </a:p>
+          <a:p>
+            <a:pPr algn="l"/>
+            <a:r>
+              <a:rPr lang="en-US" sz="750" dirty="0">
+                <a:solidFill>
+                  <a:srgbClr val="1F2937"/>
+                </a:solidFill>
+                <a:latin typeface="Consolas"/>
+                <a:cs typeface="Consolas"/>
+              </a:rPr>
+              <a:t>    Container_Boundary(c1, "Internet Banking") {</a:t>
+            </a:r>
+          </a:p>
+          <a:p>
+            <a:pPr algn="l"/>
+            <a:r>
+              <a:rPr lang="en-US" sz="750" dirty="0">
+                <a:solidFill>
+                  <a:srgbClr val="1F2937"/>
+                </a:solidFill>
+                <a:latin typeface="Consolas"/>
+                <a:cs typeface="Consolas"/>
+              </a:rPr>
+              <a:t>        Container(spa, "Single-Page App", "JavaScript, Angular", "Provides all the Internet banking functionality to customers via their web browser")</a:t>
+            </a:r>
+          </a:p>
+          <a:p>
+            <a:pPr algn="l"/>
+            <a:r>
+              <a:rPr lang="en-US" sz="750" dirty="0">
+                <a:solidFill>
+                  <a:srgbClr val="1F2937"/>
+                </a:solidFill>
+                <a:latin typeface="Consolas"/>
+                <a:cs typeface="Consolas"/>
+              </a:rPr>
+              <a:t>        Container_Ext(mobile_app, "Mobile App", "C#, Xamarin", "Provides a limited subset of the Internet banking functionality to customers via their mobile device")</a:t>
+            </a:r>
+          </a:p>
+          <a:p>
+            <a:pPr algn="l"/>
+            <a:r>
+              <a:rPr lang="en-US" sz="750" dirty="0">
+                <a:solidFill>
+                  <a:srgbClr val="1F2937"/>
+                </a:solidFill>
+                <a:latin typeface="Consolas"/>
+                <a:cs typeface="Consolas"/>
+              </a:rPr>
+              <a:t>        Container(web_app, "Web Application", "Java, Spring MVC", "Delivers the static content and the Internet banking SPA")</a:t>
+            </a:r>
+          </a:p>
+          <a:p>
+            <a:pPr algn="l"/>
+            <a:r>
+              <a:rPr lang="en-US" sz="750" dirty="0">
+                <a:solidFill>
+                  <a:srgbClr val="1F2937"/>
+                </a:solidFill>
+                <a:latin typeface="Consolas"/>
+                <a:cs typeface="Consolas"/>
+              </a:rPr>
+              <a:t>        ContainerDb(database, "Database", "SQL Database", "Stores user registration information, hashed auth credentials, access logs, etc.")</a:t>
+            </a:r>
+          </a:p>
+          <a:p>
+            <a:pPr algn="l"/>
+            <a:r>
+              <a:rPr lang="en-US" sz="750" dirty="0">
+                <a:solidFill>
+                  <a:srgbClr val="1F2937"/>
+                </a:solidFill>
+                <a:latin typeface="Consolas"/>
+                <a:cs typeface="Consolas"/>
+              </a:rPr>
+              <a:t>        ContainerDb_Ext(backend_api, "API Application", "Java, Docker Container", "Provides Internet banking functionality via API")</a:t>
+            </a:r>
+          </a:p>
+          <a:p>
+            <a:pPr algn="l"/>
+            <a:r>
+              <a:rPr lang="en-US" sz="750" dirty="0">
+                <a:solidFill>
+                  <a:srgbClr val="1F2937"/>
+                </a:solidFill>
+                <a:latin typeface="Consolas"/>
+                <a:cs typeface="Consolas"/>
+              </a:rPr>
+              <a:t>    }</a:t>
+            </a:r>
+          </a:p>
+          <a:p>
+            <a:endParaRPr lang="en-US" sz="750" dirty="0"/>
+          </a:p>
+          <a:p>
+            <a:pPr algn="l"/>
+            <a:r>
+              <a:rPr lang="en-US" sz="750" dirty="0">
+                <a:solidFill>
+                  <a:srgbClr val="1F2937"/>
+                </a:solidFill>
+                <a:latin typeface="Consolas"/>
+                <a:cs typeface="Consolas"/>
+              </a:rPr>
+              <a:t>    System_Ext(banking_system, "Mainframe Banking System", "Stores all of the core banking information about customers, accounts, transactions, etc.")</a:t>
+            </a:r>
+          </a:p>
+          <a:p>
+            <a:endParaRPr lang="en-US" sz="750" dirty="0"/>
+          </a:p>
+          <a:p>
+            <a:pPr algn="l"/>
+            <a:r>
+              <a:rPr lang="en-US" sz="750" dirty="0">
+                <a:solidFill>
+                  <a:srgbClr val="1F2937"/>
+                </a:solidFill>
+                <a:latin typeface="Consolas"/>
+                <a:cs typeface="Consolas"/>
+              </a:rPr>
+              <a:t>    Rel(customer, web_app, "Uses", "HTTPS")</a:t>
+            </a:r>
+          </a:p>
+          <a:p>
+            <a:pPr algn="l"/>
+            <a:r>
+              <a:rPr lang="en-US" sz="750" dirty="0">
+                <a:solidFill>
+                  <a:srgbClr val="1F2937"/>
+                </a:solidFill>
+                <a:latin typeface="Consolas"/>
+                <a:cs typeface="Consolas"/>
+              </a:rPr>
+              <a:t>    Rel(customer, spa, "Uses", "HTTPS")</a:t>
+            </a:r>
+          </a:p>
+          <a:p>
+            <a:pPr algn="l"/>
+            <a:r>
+              <a:rPr lang="en-US" sz="750" dirty="0">
+                <a:solidFill>
+                  <a:srgbClr val="1F2937"/>
+                </a:solidFill>
+                <a:latin typeface="Consolas"/>
+                <a:cs typeface="Consolas"/>
+              </a:rPr>
+              <a:t>    Rel(customer, mobile_app, "Uses")</a:t>
+            </a:r>
+          </a:p>
+          <a:p>
+            <a:endParaRPr lang="en-US" sz="750" dirty="0"/>
+          </a:p>
+          <a:p>
+            <a:pPr algn="l"/>
+            <a:r>
+              <a:rPr lang="en-US" sz="750" dirty="0">
+                <a:solidFill>
+                  <a:srgbClr val="1F2937"/>
+                </a:solidFill>
+                <a:latin typeface="Consolas"/>
+                <a:cs typeface="Consolas"/>
+              </a:rPr>
+              <a:t>    Rel(web_app, spa, "Delivers")</a:t>
+            </a:r>
+          </a:p>
+          <a:p>
+            <a:pPr algn="l"/>
+            <a:r>
+              <a:rPr lang="en-US" sz="750" dirty="0">
+                <a:solidFill>
+                  <a:srgbClr val="1F2937"/>
+                </a:solidFill>
+                <a:latin typeface="Consolas"/>
+                <a:cs typeface="Consolas"/>
+              </a:rPr>
+              <a:t>    Rel(spa, backend_api, "Uses", "async, JSON/HTTPS")</a:t>
+            </a:r>
+          </a:p>
+          <a:p>
+            <a:pPr algn="l"/>
+            <a:r>
+              <a:rPr lang="en-US" sz="750" dirty="0">
+                <a:solidFill>
+                  <a:srgbClr val="1F2937"/>
+                </a:solidFill>
+                <a:latin typeface="Consolas"/>
+                <a:cs typeface="Consolas"/>
+              </a:rPr>
+              <a:t>    Rel(mobile_app, backend_api, "Uses", "async, JSON/HTTPS")</a:t>
+            </a:r>
+          </a:p>
+          <a:p>
+            <a:pPr algn="l"/>
+            <a:r>
+              <a:rPr lang="en-US" sz="750" dirty="0">
+                <a:solidFill>
+                  <a:srgbClr val="1F2937"/>
+                </a:solidFill>
+                <a:latin typeface="Consolas"/>
+                <a:cs typeface="Consolas"/>
+              </a:rPr>
+              <a:t>    Rel_Back(database, backend_api, "Reads from and writes to", "sync, JDBC")</a:t>
+            </a:r>
+          </a:p>
+          <a:p>
+            <a:endParaRPr lang="en-US" sz="750" dirty="0"/>
+          </a:p>
+          <a:p>
+            <a:pPr algn="l"/>
+            <a:r>
+              <a:rPr lang="en-US" sz="750" dirty="0">
+                <a:solidFill>
+                  <a:srgbClr val="1F2937"/>
+                </a:solidFill>
+                <a:latin typeface="Consolas"/>
+                <a:cs typeface="Consolas"/>
+              </a:rPr>
+              <a:t>    Rel(email_system, customer, "Sends e-mails to")</a:t>
+            </a:r>
+          </a:p>
+          <a:p>
+            <a:pPr algn="l"/>
+            <a:r>
+              <a:rPr lang="en-US" sz="750" dirty="0">
+                <a:solidFill>
+                  <a:srgbClr val="1F2937"/>
+                </a:solidFill>
+                <a:latin typeface="Consolas"/>
+                <a:cs typeface="Consolas"/>
+              </a:rPr>
+              <a:t>    Rel(backend_api, email_system, "Sends e-mails using", "sync, SMTP")</a:t>
+            </a:r>
+          </a:p>
+          <a:p>
+            <a:pPr algn="l"/>
+            <a:r>
+              <a:rPr lang="en-US" sz="750" dirty="0">
+                <a:solidFill>
+                  <a:srgbClr val="1F2937"/>
+                </a:solidFill>
+                <a:latin typeface="Consolas"/>
+                <a:cs typeface="Consolas"/>
+              </a:rPr>
+              <a:t>    Rel(backend_api, banking_system, "Uses", "sync/async, XML/HTTPS")</a:t>
             </a:r>
           </a:p>
         </p:txBody>
